--- a/Jiyoon/발표용찐찐최종.pptx
+++ b/Jiyoon/발표용찐찐최종.pptx
@@ -271,7 +271,6 @@
           </a:p>
         </c:rich>
       </c:tx>
-      <c:layout/>
       <c:overlay val="0"/>
     </c:title>
     <c:autoTitleDeleted val="0"/>
@@ -337,7 +336,6 @@
             <c:showLeaderLines val="0"/>
             <c:extLst>
               <c:ext xmlns:c15="http://schemas.microsoft.com/office/drawing/2012/chart" uri="{CE6537A1-D6FC-4f65-9D91-7224C49458BB}">
-                <c15:layout/>
                 <c15:showLeaderLines val="0"/>
               </c:ext>
             </c:extLst>
@@ -463,7 +461,6 @@
             <c:showLeaderLines val="0"/>
             <c:extLst>
               <c:ext xmlns:c15="http://schemas.microsoft.com/office/drawing/2012/chart" uri="{CE6537A1-D6FC-4f65-9D91-7224C49458BB}">
-                <c15:layout/>
                 <c15:showLeaderLines val="0"/>
               </c:ext>
             </c:extLst>
@@ -652,7 +649,6 @@
     </c:plotArea>
     <c:legend>
       <c:legendPos val="t"/>
-      <c:layout/>
       <c:overlay val="0"/>
       <c:txPr>
         <a:bodyPr/>
@@ -814,7 +810,6 @@
           </a:p>
         </c:rich>
       </c:tx>
-      <c:layout/>
       <c:overlay val="0"/>
     </c:title>
     <c:autoTitleDeleted val="0"/>
@@ -880,7 +875,6 @@
             <c:showLeaderLines val="0"/>
             <c:extLst>
               <c:ext xmlns:c15="http://schemas.microsoft.com/office/drawing/2012/chart" uri="{CE6537A1-D6FC-4f65-9D91-7224C49458BB}">
-                <c15:layout/>
                 <c15:showLeaderLines val="0"/>
               </c:ext>
             </c:extLst>
@@ -1115,7 +1109,6 @@
           </a:p>
         </c:rich>
       </c:tx>
-      <c:layout/>
       <c:overlay val="0"/>
     </c:title>
     <c:autoTitleDeleted val="0"/>
@@ -1181,7 +1174,6 @@
             <c:showLeaderLines val="0"/>
             <c:extLst>
               <c:ext xmlns:c15="http://schemas.microsoft.com/office/drawing/2012/chart" uri="{CE6537A1-D6FC-4f65-9D91-7224C49458BB}">
-                <c15:layout/>
                 <c15:showLeaderLines val="0"/>
               </c:ext>
             </c:extLst>
@@ -1437,7 +1429,6 @@
           </a:p>
         </c:rich>
       </c:tx>
-      <c:layout/>
       <c:overlay val="0"/>
     </c:title>
     <c:autoTitleDeleted val="0"/>
@@ -1503,7 +1494,6 @@
             <c:showLeaderLines val="0"/>
             <c:extLst>
               <c:ext xmlns:c15="http://schemas.microsoft.com/office/drawing/2012/chart" uri="{CE6537A1-D6FC-4f65-9D91-7224C49458BB}">
-                <c15:layout/>
                 <c15:showLeaderLines val="0"/>
               </c:ext>
             </c:extLst>
@@ -1785,7 +1775,6 @@
           </a:p>
         </c:rich>
       </c:tx>
-      <c:layout/>
       <c:overlay val="0"/>
     </c:title>
     <c:autoTitleDeleted val="0"/>
@@ -1851,7 +1840,6 @@
             <c:showLeaderLines val="0"/>
             <c:extLst>
               <c:ext xmlns:c15="http://schemas.microsoft.com/office/drawing/2012/chart" uri="{CE6537A1-D6FC-4f65-9D91-7224C49458BB}">
-                <c15:layout/>
                 <c15:showLeaderLines val="0"/>
               </c:ext>
             </c:extLst>
@@ -2113,7 +2101,6 @@
           </a:p>
         </c:rich>
       </c:tx>
-      <c:layout/>
       <c:overlay val="0"/>
     </c:title>
     <c:autoTitleDeleted val="0"/>
@@ -2179,7 +2166,6 @@
             <c:showLeaderLines val="0"/>
             <c:extLst>
               <c:ext xmlns:c15="http://schemas.microsoft.com/office/drawing/2012/chart" uri="{CE6537A1-D6FC-4f65-9D91-7224C49458BB}">
-                <c15:layout/>
                 <c15:showLeaderLines val="0"/>
               </c:ext>
             </c:extLst>
@@ -2435,7 +2421,6 @@
           </a:p>
         </c:rich>
       </c:tx>
-      <c:layout/>
       <c:overlay val="0"/>
     </c:title>
     <c:autoTitleDeleted val="0"/>
@@ -2501,7 +2486,6 @@
             <c:showLeaderLines val="0"/>
             <c:extLst>
               <c:ext xmlns:c15="http://schemas.microsoft.com/office/drawing/2012/chart" uri="{CE6537A1-D6FC-4f65-9D91-7224C49458BB}">
-                <c15:layout/>
                 <c15:showLeaderLines val="0"/>
               </c:ext>
             </c:extLst>
@@ -2633,7 +2617,6 @@
             <c:showLeaderLines val="0"/>
             <c:extLst>
               <c:ext xmlns:c15="http://schemas.microsoft.com/office/drawing/2012/chart" uri="{CE6537A1-D6FC-4f65-9D91-7224C49458BB}">
-                <c15:layout/>
                 <c15:showLeaderLines val="0"/>
               </c:ext>
             </c:extLst>
@@ -2828,7 +2811,6 @@
     </c:plotArea>
     <c:legend>
       <c:legendPos val="t"/>
-      <c:layout/>
       <c:overlay val="0"/>
       <c:txPr>
         <a:bodyPr/>
@@ -2924,7 +2906,6 @@
           </a:p>
         </c:rich>
       </c:tx>
-      <c:layout/>
       <c:overlay val="0"/>
     </c:title>
     <c:autoTitleDeleted val="0"/>
@@ -2990,7 +2971,6 @@
             <c:showLeaderLines val="0"/>
             <c:extLst>
               <c:ext xmlns:c15="http://schemas.microsoft.com/office/drawing/2012/chart" uri="{CE6537A1-D6FC-4f65-9D91-7224C49458BB}">
-                <c15:layout/>
                 <c15:showLeaderLines val="0"/>
               </c:ext>
             </c:extLst>
@@ -3116,7 +3096,6 @@
             <c:showLeaderLines val="0"/>
             <c:extLst>
               <c:ext xmlns:c15="http://schemas.microsoft.com/office/drawing/2012/chart" uri="{CE6537A1-D6FC-4f65-9D91-7224C49458BB}">
-                <c15:layout/>
                 <c15:showLeaderLines val="0"/>
               </c:ext>
             </c:extLst>
@@ -3305,7 +3284,6 @@
     </c:plotArea>
     <c:legend>
       <c:legendPos val="t"/>
-      <c:layout/>
       <c:overlay val="0"/>
       <c:txPr>
         <a:bodyPr/>
@@ -3401,7 +3379,6 @@
           </a:p>
         </c:rich>
       </c:tx>
-      <c:layout/>
       <c:overlay val="0"/>
     </c:title>
     <c:autoTitleDeleted val="0"/>
@@ -3467,7 +3444,6 @@
             <c:showLeaderLines val="0"/>
             <c:extLst>
               <c:ext xmlns:c15="http://schemas.microsoft.com/office/drawing/2012/chart" uri="{CE6537A1-D6FC-4f65-9D91-7224C49458BB}">
-                <c15:layout/>
                 <c15:showLeaderLines val="0"/>
               </c:ext>
             </c:extLst>
@@ -3724,7 +3700,6 @@
           </a:p>
         </c:rich>
       </c:tx>
-      <c:layout/>
       <c:overlay val="0"/>
     </c:title>
     <c:autoTitleDeleted val="0"/>
@@ -3790,7 +3765,6 @@
             <c:showLeaderLines val="0"/>
             <c:extLst>
               <c:ext xmlns:c15="http://schemas.microsoft.com/office/drawing/2012/chart" uri="{CE6537A1-D6FC-4f65-9D91-7224C49458BB}">
-                <c15:layout/>
                 <c15:showLeaderLines val="0"/>
               </c:ext>
             </c:extLst>
@@ -4966,7 +4940,7 @@
             </a:r>
             <a:r>
               <a:rPr lang="ko-KR" altLang="en-US" b="1" dirty="0" smtClean="0"/>
-              <a:t>실제로 미래를 예측할 때 알 수 있는 정보만 사용하는 것</a:t>
+              <a:t>실제로 예측할 때 알 수 있는 정보만 사용하는 것</a:t>
             </a:r>
             <a:r>
               <a:rPr lang="ko-KR" altLang="en-US" dirty="0" smtClean="0"/>
@@ -4974,14 +4948,10 @@
             </a:r>
             <a:r>
               <a:rPr lang="en-US" altLang="ko-KR" dirty="0" smtClean="0"/>
-              <a:t>.</a:t>
-            </a:r>
-          </a:p>
-          <a:p>
-            <a:r>
-              <a:rPr lang="ko-KR" altLang="en-US" dirty="0" smtClean="0"/>
-              <a:t>따라서 </a:t>
-            </a:r>
+              <a:t>. </a:t>
+            </a:r>
+          </a:p>
+          <a:p>
             <a:r>
               <a:rPr lang="ko-KR" altLang="en-US" dirty="0" smtClean="0"/>
               <a:t>이송 예측에는 지난달이나 작년 같은 시기의 정보를 사용하고</a:t>
@@ -4990,6 +4960,8 @@
               <a:rPr lang="en-US" altLang="ko-KR" dirty="0" smtClean="0"/>
               <a:t>, </a:t>
             </a:r>
+          </a:p>
+          <a:p>
             <a:r>
               <a:rPr lang="ko-KR" altLang="en-US" dirty="0" smtClean="0"/>
               <a:t>인구 예측에는 전날이나 일주일 전의 정보를 사용하는 방식으로 구성했습니다</a:t>
@@ -5095,16 +5067,8 @@
           <a:lstStyle/>
           <a:p>
             <a:r>
-              <a:rPr lang="ko-KR" altLang="en-US" dirty="0" smtClean="0"/>
-              <a:t>만들어진 모든 변수를 그대로 사용하지 않고</a:t>
-            </a:r>
-            <a:r>
-              <a:rPr lang="en-US" altLang="ko-KR" dirty="0" smtClean="0"/>
-              <a:t>, </a:t>
-            </a:r>
-            <a:r>
               <a:rPr lang="ko-KR" altLang="en-US" b="1" dirty="0" err="1" smtClean="0"/>
-              <a:t>결측이</a:t>
+              <a:t>결측치가</a:t>
             </a:r>
             <a:r>
               <a:rPr lang="ko-KR" altLang="en-US" b="1" dirty="0" smtClean="0"/>
@@ -6076,7 +6040,7 @@
           <a:p>
             <a:r>
               <a:rPr lang="ko-KR" altLang="en-US" dirty="0" smtClean="0"/>
-              <a:t>모델을 학습할 때는 데이터를 무작위로 섞지 않고 </a:t>
+              <a:t>모델을 학습할 때는 </a:t>
             </a:r>
             <a:r>
               <a:rPr lang="ko-KR" altLang="en-US" b="1" dirty="0" smtClean="0"/>
@@ -6652,23 +6616,23 @@
             </a:r>
             <a:r>
               <a:rPr lang="ko-KR" altLang="en-US" dirty="0" smtClean="0"/>
-              <a:t>전체적인 변화 경향을 안정적으로 반영하는 </a:t>
+              <a:t>전체적인 변화 경향을 안정적으로 반영하는 리지 와 복잡한 패턴을 학습하는 </a:t>
+            </a:r>
+            <a:r>
+              <a:rPr lang="ko-KR" altLang="en-US" dirty="0" err="1" smtClean="0"/>
+              <a:t>그레디언트</a:t>
             </a:r>
             <a:r>
               <a:rPr lang="en-US" altLang="ko-KR" dirty="0" smtClean="0"/>
-              <a:t>Ridge</a:t>
+              <a:t> </a:t>
+            </a:r>
+            <a:r>
+              <a:rPr lang="ko-KR" altLang="en-US" dirty="0" err="1" smtClean="0"/>
+              <a:t>부스팅</a:t>
             </a:r>
             <a:r>
               <a:rPr lang="ko-KR" altLang="en-US" dirty="0" smtClean="0"/>
-              <a:t>와 복잡한 패턴을 학습하는 </a:t>
-            </a:r>
-            <a:r>
-              <a:rPr lang="en-US" altLang="ko-KR" dirty="0" smtClean="0"/>
-              <a:t>Gradient Boosting</a:t>
-            </a:r>
-            <a:r>
-              <a:rPr lang="ko-KR" altLang="en-US" dirty="0" smtClean="0"/>
-              <a:t>을 결합했을 때 서로의 단점을 보완할 수 있었고</a:t>
+              <a:t> 을 결합했을 때 서로의 단점을 보완할 수 있었고</a:t>
             </a:r>
             <a:r>
               <a:rPr lang="en-US" altLang="ko-KR" dirty="0" smtClean="0"/>
@@ -6701,20 +6665,20 @@
               <a:t>따라서 </a:t>
             </a:r>
             <a:r>
+              <a:rPr lang="ko-KR" altLang="en-US" dirty="0" err="1" smtClean="0"/>
+              <a:t>그레디언트</a:t>
+            </a:r>
+            <a:r>
               <a:rPr lang="en-US" altLang="ko-KR" dirty="0" smtClean="0"/>
-              <a:t>Gradient Boosting</a:t>
+              <a:t> </a:t>
+            </a:r>
+            <a:r>
+              <a:rPr lang="ko-KR" altLang="en-US" dirty="0" err="1" smtClean="0"/>
+              <a:t>부스팅</a:t>
             </a:r>
             <a:r>
               <a:rPr lang="ko-KR" altLang="en-US" dirty="0" smtClean="0"/>
-              <a:t>과 </a:t>
-            </a:r>
-            <a:r>
-              <a:rPr lang="en-US" altLang="ko-KR" dirty="0" smtClean="0"/>
-              <a:t>Ridge</a:t>
-            </a:r>
-            <a:r>
-              <a:rPr lang="ko-KR" altLang="en-US" dirty="0" smtClean="0"/>
-              <a:t>의 결과를 앙상블 모델을 최종 모델로 선정했습니다</a:t>
+              <a:t> 과 리지의 결과를 앙상블 모델을 최종 모델로 선정했습니다</a:t>
             </a:r>
             <a:r>
               <a:rPr lang="en-US" altLang="ko-KR" dirty="0" smtClean="0"/>
@@ -7595,11 +7559,11 @@
           <a:p>
             <a:r>
               <a:rPr lang="ko-KR" altLang="en-US" dirty="0" smtClean="0"/>
-              <a:t>두 예측 모두 </a:t>
+              <a:t>모두 예측 두 </a:t>
             </a:r>
             <a:r>
               <a:rPr lang="ko-KR" altLang="en-US" b="1" dirty="0" smtClean="0"/>
-              <a:t>최근의 과거 값이 가장 중요한 정보로 작용했고</a:t>
+              <a:t>가장 가까운 과거 값이 가장 중요한 정보로 작용했고</a:t>
             </a:r>
             <a:r>
               <a:rPr lang="en-US" altLang="ko-KR" dirty="0" smtClean="0"/>
@@ -7738,7 +7702,7 @@
           <a:p>
             <a:r>
               <a:rPr lang="ko-KR" altLang="en-US" dirty="0" smtClean="0"/>
-              <a:t>이렇게 생성된 예측 결과는 파일로만 저장하는 것이 아니라 이후 웹 서비스와 연결해 사용자가 직접 확인할 수 있도록 했습니다</a:t>
+              <a:t>이렇게 생성된 예측 결과는 웹 서비스와 연결해 사용자가 직접 확인할 수 있도록 했습니다</a:t>
             </a:r>
             <a:r>
               <a:rPr lang="en-US" altLang="ko-KR" dirty="0" smtClean="0"/>
@@ -8515,6 +8479,23 @@
             </a:r>
           </a:p>
           <a:p>
+            <a:pPr marL="0" marR="0" indent="0" algn="l" defTabSz="914400" rtl="0" eaLnBrk="1" fontAlgn="auto" latinLnBrk="1" hangingPunct="1">
+              <a:lnSpc>
+                <a:spcPct val="100000"/>
+              </a:lnSpc>
+              <a:spcBef>
+                <a:spcPts val="0"/>
+              </a:spcBef>
+              <a:spcAft>
+                <a:spcPts val="0"/>
+              </a:spcAft>
+              <a:buClrTx/>
+              <a:buSzTx/>
+              <a:buFontTx/>
+              <a:buNone/>
+              <a:tabLst/>
+              <a:defRPr/>
+            </a:pPr>
             <a:r>
               <a:rPr lang="ko-KR" altLang="en-US" dirty="0" smtClean="0"/>
               <a:t>향후 유관 부서의 협업이 있을 경우</a:t>
@@ -8545,7 +8526,14 @@
             </a:r>
             <a:r>
               <a:rPr lang="ko-KR" altLang="en-US" b="1" dirty="0" smtClean="0"/>
-              <a:t>구급차 배치와 응급 의료 병상 수 포화 예측 및 현장의 병원 선택까지 지원할 수 있는 시스템으로 확장하는 것 </a:t>
+              <a:t>구급차 배치와 응급 의료 병상 수 포화 예측 및 현장의 병</a:t>
+            </a:r>
+            <a:endParaRPr lang="en-US" altLang="ko-KR" dirty="0" smtClean="0"/>
+          </a:p>
+          <a:p>
+            <a:r>
+              <a:rPr lang="ko-KR" altLang="en-US" b="1" dirty="0" smtClean="0"/>
+              <a:t>원 선택까지 지원할 수 있는 시스템으로 확장하는 것 </a:t>
             </a:r>
             <a:r>
               <a:rPr lang="ko-KR" altLang="en-US" dirty="0" smtClean="0"/>
@@ -8570,7 +8558,7 @@
               <a:t>감사합니다</a:t>
             </a:r>
             <a:r>
-              <a:rPr lang="en-US" altLang="ko-KR" dirty="0" smtClean="0"/>
+              <a:rPr lang="en-US" altLang="ko-KR" smtClean="0"/>
               <a:t>.</a:t>
             </a:r>
           </a:p>
@@ -9312,12 +9300,56 @@
           <a:p>
             <a:r>
               <a:rPr lang="ko-KR" altLang="en-US" dirty="0" smtClean="0"/>
-              <a:t>데이터를 확인해보니 자료마다 집계 기준이나 시간 단위가 서로 달랐습니다</a:t>
+              <a:t>데이터의 양보다는 </a:t>
+            </a:r>
+            <a:r>
+              <a:rPr lang="ko-KR" altLang="en-US" b="1" dirty="0" smtClean="0"/>
+              <a:t>예측 목적과 기준에 맞는 데이터를 사용하는 것</a:t>
+            </a:r>
+            <a:r>
+              <a:rPr lang="ko-KR" altLang="en-US" dirty="0" smtClean="0"/>
+              <a:t>에 중점을 두었습니다</a:t>
             </a:r>
             <a:r>
               <a:rPr lang="en-US" altLang="ko-KR" dirty="0" smtClean="0"/>
               <a:t>.</a:t>
             </a:r>
+          </a:p>
+          <a:p>
+            <a:endParaRPr lang="en-US" altLang="ko-KR" dirty="0" smtClean="0"/>
+          </a:p>
+          <a:p>
+            <a:endParaRPr lang="en-US" altLang="ko-KR" dirty="0" smtClean="0"/>
+          </a:p>
+          <a:p>
+            <a:endParaRPr lang="en-US" altLang="ko-KR" dirty="0" smtClean="0"/>
+          </a:p>
+          <a:p>
+            <a:r>
+              <a:rPr lang="en-US" altLang="ko-KR" dirty="0" smtClean="0"/>
+              <a:t>(</a:t>
+            </a:r>
+            <a:r>
+              <a:rPr lang="ko-KR" altLang="en-US" dirty="0" smtClean="0"/>
+              <a:t>참고</a:t>
+            </a:r>
+            <a:r>
+              <a:rPr lang="en-US" altLang="ko-KR" dirty="0" smtClean="0"/>
+              <a:t>) </a:t>
+            </a:r>
+          </a:p>
+          <a:p>
+            <a:endParaRPr lang="en-US" altLang="ko-KR" dirty="0" smtClean="0"/>
+          </a:p>
+          <a:p>
+            <a:r>
+              <a:rPr lang="ko-KR" altLang="en-US" dirty="0" smtClean="0"/>
+              <a:t>데이터를 확인해보니 자료마다 집계 기준이나 시간 단위가 서로 달랐습니다</a:t>
+            </a:r>
+            <a:r>
+              <a:rPr lang="en-US" altLang="ko-KR" dirty="0" smtClean="0"/>
+              <a:t>.</a:t>
+            </a:r>
             <a:r>
               <a:rPr lang="en-US" altLang="ko-KR" baseline="0" dirty="0" smtClean="0"/>
               <a:t> </a:t>
@@ -9330,50 +9362,39 @@
               <a:rPr lang="en-US" altLang="ko-KR" dirty="0" smtClean="0"/>
               <a:t>.</a:t>
             </a:r>
+          </a:p>
+          <a:p>
+            <a:r>
+              <a:rPr lang="ko-KR" altLang="en-US" dirty="0" smtClean="0"/>
+              <a:t>예를 들어 실시간 병상 정보는 특정 시점의 상태를 보여주기 때문에 장기간의 구급 수요 예측에는 사용하지 않고</a:t>
+            </a:r>
+            <a:r>
+              <a:rPr lang="en-US" altLang="ko-KR" dirty="0" smtClean="0"/>
+              <a:t>, </a:t>
+            </a:r>
+            <a:r>
+              <a:rPr lang="ko-KR" altLang="en-US" b="1" dirty="0" smtClean="0"/>
+              <a:t>웹 서비스에서 현재 병상 상태를 보여주는 용도</a:t>
+            </a:r>
+            <a:r>
+              <a:rPr lang="ko-KR" altLang="en-US" dirty="0" smtClean="0"/>
+              <a:t>로 활용했습니다</a:t>
+            </a:r>
+            <a:r>
+              <a:rPr lang="en-US" altLang="ko-KR" dirty="0" smtClean="0"/>
+              <a:t>.</a:t>
+            </a:r>
             <a:r>
               <a:rPr lang="en-US" altLang="ko-KR" baseline="0" dirty="0" smtClean="0"/>
               <a:t> </a:t>
             </a:r>
-            <a:r>
-              <a:rPr lang="ko-KR" altLang="en-US" dirty="0" smtClean="0"/>
-              <a:t>예를 들어 실시간 병상 정보는 특정 시점의 상태를 보여주기 때문에 장기간의 구급 수요 예측에는 사용하지 않고</a:t>
-            </a:r>
-            <a:r>
-              <a:rPr lang="en-US" altLang="ko-KR" dirty="0" smtClean="0"/>
-              <a:t>, </a:t>
-            </a:r>
-            <a:r>
-              <a:rPr lang="ko-KR" altLang="en-US" b="1" dirty="0" smtClean="0"/>
-              <a:t>웹 서비스에서 현재 병상 상태를 보여주는 용도</a:t>
-            </a:r>
-            <a:r>
-              <a:rPr lang="ko-KR" altLang="en-US" dirty="0" smtClean="0"/>
-              <a:t>로 활용했습니다</a:t>
-            </a:r>
-            <a:r>
-              <a:rPr lang="en-US" altLang="ko-KR" dirty="0" smtClean="0"/>
-              <a:t>.</a:t>
-            </a:r>
-            <a:r>
-              <a:rPr lang="en-US" altLang="ko-KR" baseline="0" dirty="0" smtClean="0"/>
-              <a:t> </a:t>
-            </a:r>
-            <a:r>
-              <a:rPr lang="ko-KR" altLang="en-US" dirty="0" smtClean="0"/>
-              <a:t>즉 데이터의 양보다는 </a:t>
-            </a:r>
-            <a:r>
-              <a:rPr lang="ko-KR" altLang="en-US" b="1" dirty="0" smtClean="0"/>
-              <a:t>예측 목적과 기준에 맞는 데이터를 사용하는 것</a:t>
-            </a:r>
-            <a:r>
-              <a:rPr lang="ko-KR" altLang="en-US" dirty="0" smtClean="0"/>
-              <a:t>에 중점을 두었습니다</a:t>
-            </a:r>
-            <a:r>
-              <a:rPr lang="en-US" altLang="ko-KR" dirty="0" smtClean="0"/>
-              <a:t>.</a:t>
-            </a:r>
+            <a:endParaRPr lang="en-US" altLang="ko-KR" dirty="0" smtClean="0"/>
+          </a:p>
+          <a:p>
+            <a:endParaRPr lang="en-US" altLang="ko-KR" dirty="0" smtClean="0"/>
+          </a:p>
+          <a:p>
+            <a:endParaRPr lang="en-US" altLang="ko-KR" dirty="0" smtClean="0"/>
           </a:p>
           <a:p>
             <a:endParaRPr lang="en-US" altLang="ko-KR" dirty="0"/>
@@ -12284,6 +12305,13 @@
   <p:clrMapOvr>
     <a:masterClrMapping/>
   </p:clrMapOvr>
+  <p:timing>
+    <p:tnLst>
+      <p:par>
+        <p:cTn id="1" dur="indefinite" restart="never" nodeType="tmRoot"/>
+      </p:par>
+    </p:tnLst>
+  </p:timing>
 </p:sld>
 </file>
 
@@ -47042,6 +47070,13 @@
   <p:clrMapOvr>
     <a:masterClrMapping/>
   </p:clrMapOvr>
+  <p:timing>
+    <p:tnLst>
+      <p:par>
+        <p:cTn id="1" dur="indefinite" restart="never" nodeType="tmRoot"/>
+      </p:par>
+    </p:tnLst>
+  </p:timing>
 </p:sld>
 </file>
 
@@ -49716,6 +49751,13 @@
   <p:clrMapOvr>
     <a:masterClrMapping/>
   </p:clrMapOvr>
+  <p:timing>
+    <p:tnLst>
+      <p:par>
+        <p:cTn id="1" dur="indefinite" restart="never" nodeType="tmRoot"/>
+      </p:par>
+    </p:tnLst>
+  </p:timing>
 </p:sld>
 </file>
 
@@ -51819,6 +51861,13 @@
   <p:clrMapOvr>
     <a:masterClrMapping/>
   </p:clrMapOvr>
+  <p:timing>
+    <p:tnLst>
+      <p:par>
+        <p:cTn id="1" dur="indefinite" restart="never" nodeType="tmRoot"/>
+      </p:par>
+    </p:tnLst>
+  </p:timing>
 </p:sld>
 </file>
 
